--- a/presentation/3-Interpretability-XAIMethods.pptx
+++ b/presentation/3-Interpretability-XAIMethods.pptx
@@ -229,7 +229,7 @@
           <a:p>
             <a:fld id="{C5BA3DF1-419F-4396-AE23-2FADD3683DAD}" type="datetimeFigureOut">
               <a:rPr lang="en-IN" smtClean="0"/>
-              <a:t>21-09-2025</a:t>
+              <a:t>23-02-2026</a:t>
             </a:fld>
             <a:endParaRPr lang="en-IN"/>
           </a:p>
@@ -410,7 +410,7 @@
           <a:p>
             <a:fld id="{83A6DFB3-D709-4817-8757-3B1955B6C311}" type="datetimeFigureOut">
               <a:rPr lang="en-IN" smtClean="0"/>
-              <a:t>21-09-2025</a:t>
+              <a:t>23-02-2026</a:t>
             </a:fld>
             <a:endParaRPr lang="en-IN"/>
           </a:p>
@@ -2578,7 +2578,7 @@
           <a:p>
             <a:fld id="{3A6BD9D9-0201-491D-850A-4E48B8CC6FB5}" type="datetime1">
               <a:rPr lang="en-IN" smtClean="0"/>
-              <a:t>21-09-2025</a:t>
+              <a:t>23-02-2026</a:t>
             </a:fld>
             <a:endParaRPr lang="en-IN"/>
           </a:p>
@@ -2781,7 +2781,7 @@
           <a:p>
             <a:fld id="{75E8E471-E374-414F-ACAE-271604EC180C}" type="datetime1">
               <a:rPr lang="en-IN" smtClean="0"/>
-              <a:t>21-09-2025</a:t>
+              <a:t>23-02-2026</a:t>
             </a:fld>
             <a:endParaRPr lang="en-IN"/>
           </a:p>
@@ -2994,7 +2994,7 @@
           <a:p>
             <a:fld id="{06209059-F8BB-4ED7-ABCA-C2BF3D4995E6}" type="datetime1">
               <a:rPr lang="en-IN" smtClean="0"/>
-              <a:t>21-09-2025</a:t>
+              <a:t>23-02-2026</a:t>
             </a:fld>
             <a:endParaRPr lang="en-IN"/>
           </a:p>
@@ -3197,7 +3197,7 @@
           <a:p>
             <a:fld id="{33585BB6-7F57-4C30-AECB-DA0D27197DA6}" type="datetime1">
               <a:rPr lang="en-IN" smtClean="0"/>
-              <a:t>21-09-2025</a:t>
+              <a:t>23-02-2026</a:t>
             </a:fld>
             <a:endParaRPr lang="en-IN"/>
           </a:p>
@@ -3476,7 +3476,7 @@
           <a:p>
             <a:fld id="{15BC85B2-39A4-4814-A92A-2973CDC9102C}" type="datetime1">
               <a:rPr lang="en-IN" smtClean="0"/>
-              <a:t>21-09-2025</a:t>
+              <a:t>23-02-2026</a:t>
             </a:fld>
             <a:endParaRPr lang="en-IN"/>
           </a:p>
@@ -3747,7 +3747,7 @@
           <a:p>
             <a:fld id="{E78293A2-8117-48A4-9605-23EE94DF99C3}" type="datetime1">
               <a:rPr lang="en-IN" smtClean="0"/>
-              <a:t>21-09-2025</a:t>
+              <a:t>23-02-2026</a:t>
             </a:fld>
             <a:endParaRPr lang="en-IN"/>
           </a:p>
@@ -4165,7 +4165,7 @@
           <a:p>
             <a:fld id="{5F75C8FC-84AC-4C10-ACC0-BD7AF63F7665}" type="datetime1">
               <a:rPr lang="en-IN" smtClean="0"/>
-              <a:t>21-09-2025</a:t>
+              <a:t>23-02-2026</a:t>
             </a:fld>
             <a:endParaRPr lang="en-IN"/>
           </a:p>
@@ -4310,7 +4310,7 @@
           <a:p>
             <a:fld id="{CFF0B640-F7B0-4E9F-B479-2364AFCFD561}" type="datetime1">
               <a:rPr lang="en-IN" smtClean="0"/>
-              <a:t>21-09-2025</a:t>
+              <a:t>23-02-2026</a:t>
             </a:fld>
             <a:endParaRPr lang="en-IN"/>
           </a:p>
@@ -4426,7 +4426,7 @@
           <a:p>
             <a:fld id="{28C955B1-F658-4E21-B29B-5C46404C65AF}" type="datetime1">
               <a:rPr lang="en-IN" smtClean="0"/>
-              <a:t>21-09-2025</a:t>
+              <a:t>23-02-2026</a:t>
             </a:fld>
             <a:endParaRPr lang="en-IN"/>
           </a:p>
@@ -4742,7 +4742,7 @@
           <a:p>
             <a:fld id="{1466127A-0CB8-41EB-AC70-2B05AA20CEB4}" type="datetime1">
               <a:rPr lang="en-IN" smtClean="0"/>
-              <a:t>21-09-2025</a:t>
+              <a:t>23-02-2026</a:t>
             </a:fld>
             <a:endParaRPr lang="en-IN"/>
           </a:p>
@@ -5034,7 +5034,7 @@
           <a:p>
             <a:fld id="{880E169A-C6D0-47B8-83D4-F4CEB7EC43EC}" type="datetime1">
               <a:rPr lang="en-IN" smtClean="0"/>
-              <a:t>21-09-2025</a:t>
+              <a:t>23-02-2026</a:t>
             </a:fld>
             <a:endParaRPr lang="en-IN"/>
           </a:p>
@@ -5280,7 +5280,7 @@
           <a:p>
             <a:fld id="{338274BC-1E24-44A8-9040-DB21F7AFD224}" type="datetime1">
               <a:rPr lang="en-IN" smtClean="0"/>
-              <a:t>21-09-2025</a:t>
+              <a:t>23-02-2026</a:t>
             </a:fld>
             <a:endParaRPr lang="en-IN"/>
           </a:p>
